--- a/decks/maths-sequences/maths-sequences_ch6_missing-terms.pptx
+++ b/decks/maths-sequences/maths-sequences_ch6_missing-terms.pptx
@@ -122,29 +122,29 @@
   <p:extLst>
     <p:ext uri="{521415D9-36F7-43E2-AB2F-B90AF26B5E84}">
       <p14:sectionLst xmlns:p14="http://schemas.microsoft.com/office/powerpoint/2010/main">
-        <p14:section name="Opening" id="{bef82b57-3581-304e-c757-a8fa0d42439d}">
+        <p14:section name="Opening" id="{c96364e5-db28-298f-b8c2-70e695df8923}">
           <p14:sldIdLst>
             <p14:sldId id="256"/>
           </p14:sldIdLst>
         </p14:section>
-        <p14:section name="Gate" id="{51f647cd-0809-3ed0-d638-cba42026a1b7}">
+        <p14:section name="Gate" id="{d1a35fe8-e1d7-cbfd-1064-bd26261f55ce}">
           <p14:sldIdLst>
             <p14:sldId id="257"/>
             <p14:sldId id="258"/>
           </p14:sldIdLst>
         </p14:section>
-        <p14:section name="Pre-teach" id="{462ebc7c-4e4c-4e34-1e03-b3acae83a805}">
+        <p14:section name="Pre-teach" id="{aff50928-645b-c89e-2ff8-1a7eaee8d299}">
           <p14:sldIdLst>
             <p14:sldId id="259"/>
           </p14:sldIdLst>
         </p14:section>
-        <p14:section name="Read-along" id="{c31b230b-7835-a299-06ff-2185c8ba6e2b}">
+        <p14:section name="Read-along" id="{760794b3-b296-008e-4384-e849ff359f91}">
           <p14:sldIdLst>
             <p14:sldId id="260"/>
             <p14:sldId id="261"/>
           </p14:sldIdLst>
         </p14:section>
-        <p14:section name="Teach" id="{c5fe1bd7-6e5a-2db2-7250-a88e0e53fde9}">
+        <p14:section name="Teach" id="{47ac92dc-4a17-09ba-5f99-467b92b7d62e}">
           <p14:sldIdLst>
             <p14:sldId id="262"/>
             <p14:sldId id="263"/>
@@ -152,18 +152,18 @@
             <p14:sldId id="265"/>
           </p14:sldIdLst>
         </p14:section>
-        <p14:section name="Routes" id="{2f080119-33d6-a1d4-36f0-4d81f6ac5a8a}">
+        <p14:section name="Routes" id="{69ce6b84-5d76-3303-b72f-8aeaf29af72f}">
           <p14:sldIdLst>
             <p14:sldId id="266"/>
             <p14:sldId id="267"/>
           </p14:sldIdLst>
         </p14:section>
-        <p14:section name="Close" id="{2ea26b38-2754-577b-0519-8c8b72a0e73f}">
+        <p14:section name="Close" id="{420cc39a-d65c-6ddb-9ae5-bd3f7d019da7}">
           <p14:sldIdLst>
             <p14:sldId id="268"/>
           </p14:sldIdLst>
         </p14:section>
-        <p14:section name="Answers" id="{53288e36-1b5c-1f2a-0754-60e61dc63a37}">
+        <p14:section name="Answers" id="{54e72b70-8d05-7616-635f-b32c086b2f3c}">
           <p14:sldIdLst>
             <p14:sldId id="269"/>
             <p14:sldId id="270"/>
@@ -948,7 +948,7 @@
               <a:rPr lang="en-US" dirty="0"/>
               <a:t>Exit ticket — individual, silent, on a slip or mini-whiteboard. Recall before help: no notes, no lanes, no hints. Collect before pupils leave.
 Question: Find the missing term: 3, 4, 7, 11, ___, 29. Each term is the sum of the two previous terms.
-Answer: A   18. The two terms before the gap are 7 and 11, and 7 + 11 = 18. Check: 11 + 18 = 29.
+Answer: D   18. The two terms before the gap are 7 and 11, and 7 + 11 = 18. Check: 11 + 18 = 29.
 Source of this question: module 3 task ("Add the two previous terms") from the manifest.
 Sort the slips: correct → ready to move on; incorrect → start next lesson in the pre-teach group, with the read-along and the Support lane. Same destination next time.</a:t>
             </a:r>
@@ -1221,7 +1221,7 @@
             <a:r>
               <a:rPr lang="en-US" dirty="0"/>
               <a:t>Answers — exit ticket: Exit ticket. Reveal the answer; pupils mark their own work in a different colour, then read the "why" together. Same destination for every lane, so one answer serves the whole class.
-Answer: A   18
+Answer: D   18
 Why: The two terms before the gap are 7 and 11, and 7 + 11 = 18. Check: 11 + 18 = 29.
 Ask a Support pupil to explain one step, and a Stretch pupil to share their extension.</a:t>
             </a:r>
@@ -6933,7 +6933,7 @@
                 <a:ea typeface="Calibri" pitchFamily="34" charset="-122"/>
                 <a:cs typeface="Calibri" pitchFamily="34" charset="-120"/>
               </a:rPr>
-              <a:t>18</a:t>
+              <a:t>15</a:t>
             </a:r>
             <a:endParaRPr lang="en-US" sz="2400" dirty="0"/>
           </a:p>
@@ -6970,7 +6970,7 @@
                 <a:ea typeface="Calibri" pitchFamily="34" charset="-122"/>
                 <a:cs typeface="Calibri" pitchFamily="34" charset="-120"/>
               </a:rPr>
-              <a:t>15</a:t>
+              <a:t>22</a:t>
             </a:r>
             <a:endParaRPr lang="en-US" sz="2400" dirty="0"/>
           </a:p>
@@ -7007,7 +7007,7 @@
                 <a:ea typeface="Calibri" pitchFamily="34" charset="-122"/>
                 <a:cs typeface="Calibri" pitchFamily="34" charset="-120"/>
               </a:rPr>
-              <a:t>22</a:t>
+              <a:t>14</a:t>
             </a:r>
             <a:endParaRPr lang="en-US" sz="2400" dirty="0"/>
           </a:p>
@@ -7044,7 +7044,7 @@
                 <a:ea typeface="Calibri" pitchFamily="34" charset="-122"/>
                 <a:cs typeface="Calibri" pitchFamily="34" charset="-120"/>
               </a:rPr>
-              <a:t>14</a:t>
+              <a:t>18</a:t>
             </a:r>
             <a:endParaRPr lang="en-US" sz="2400" dirty="0"/>
           </a:p>
@@ -8367,7 +8367,7 @@
                 <a:ea typeface="Cambria" pitchFamily="34" charset="-122"/>
                 <a:cs typeface="Cambria" pitchFamily="34" charset="-120"/>
               </a:rPr>
-              <a:t>A   18</a:t>
+              <a:t>D   18</a:t>
             </a:r>
             <a:endParaRPr lang="en-US" sz="1800" dirty="0"/>
           </a:p>
@@ -9136,7 +9136,7 @@
                 <a:ea typeface="Calibri" pitchFamily="34" charset="-122"/>
                 <a:cs typeface="Calibri" pitchFamily="34" charset="-120"/>
               </a:rPr>
-              <a:t>45</a:t>
+              <a:t>66</a:t>
             </a:r>
             <a:endParaRPr lang="en-US" sz="2400" dirty="0"/>
           </a:p>
@@ -9173,7 +9173,7 @@
                 <a:ea typeface="Calibri" pitchFamily="34" charset="-122"/>
                 <a:cs typeface="Calibri" pitchFamily="34" charset="-120"/>
               </a:rPr>
-              <a:t>31</a:t>
+              <a:t>45</a:t>
             </a:r>
             <a:endParaRPr lang="en-US" sz="2400" dirty="0"/>
           </a:p>
@@ -9210,7 +9210,7 @@
                 <a:ea typeface="Calibri" pitchFamily="34" charset="-122"/>
                 <a:cs typeface="Calibri" pitchFamily="34" charset="-120"/>
               </a:rPr>
-              <a:t>66</a:t>
+              <a:t>31</a:t>
             </a:r>
             <a:endParaRPr lang="en-US" sz="2400" dirty="0"/>
           </a:p>

--- a/decks/maths-sequences/maths-sequences_ch6_missing-terms.pptx
+++ b/decks/maths-sequences/maths-sequences_ch6_missing-terms.pptx
@@ -122,29 +122,29 @@
   <p:extLst>
     <p:ext uri="{521415D9-36F7-43E2-AB2F-B90AF26B5E84}">
       <p14:sectionLst xmlns:p14="http://schemas.microsoft.com/office/powerpoint/2010/main">
-        <p14:section name="Opening" id="{c96364e5-db28-298f-b8c2-70e695df8923}">
+        <p14:section name="Opening" id="{0bfaf43c-402e-d004-985d-65aea036206c}">
           <p14:sldIdLst>
             <p14:sldId id="256"/>
           </p14:sldIdLst>
         </p14:section>
-        <p14:section name="Gate" id="{d1a35fe8-e1d7-cbfd-1064-bd26261f55ce}">
+        <p14:section name="Gate" id="{a7921bc5-de4e-807a-9260-40dfe18ede66}">
           <p14:sldIdLst>
             <p14:sldId id="257"/>
             <p14:sldId id="258"/>
           </p14:sldIdLst>
         </p14:section>
-        <p14:section name="Pre-teach" id="{aff50928-645b-c89e-2ff8-1a7eaee8d299}">
+        <p14:section name="Pre-teach" id="{1cb3906a-a4d4-e52c-def2-addbbf133079}">
           <p14:sldIdLst>
             <p14:sldId id="259"/>
           </p14:sldIdLst>
         </p14:section>
-        <p14:section name="Read-along" id="{760794b3-b296-008e-4384-e849ff359f91}">
+        <p14:section name="Read-along" id="{d669cdba-dec3-b9a0-3fcc-3af33835e499}">
           <p14:sldIdLst>
             <p14:sldId id="260"/>
             <p14:sldId id="261"/>
           </p14:sldIdLst>
         </p14:section>
-        <p14:section name="Teach" id="{47ac92dc-4a17-09ba-5f99-467b92b7d62e}">
+        <p14:section name="Teach" id="{7b06d86d-5bdb-a6a6-a146-dafb8936a400}">
           <p14:sldIdLst>
             <p14:sldId id="262"/>
             <p14:sldId id="263"/>
@@ -152,18 +152,18 @@
             <p14:sldId id="265"/>
           </p14:sldIdLst>
         </p14:section>
-        <p14:section name="Routes" id="{69ce6b84-5d76-3303-b72f-8aeaf29af72f}">
+        <p14:section name="Routes" id="{72f5a55e-ed80-f5da-eb7c-6c68f8b1db97}">
           <p14:sldIdLst>
             <p14:sldId id="266"/>
             <p14:sldId id="267"/>
           </p14:sldIdLst>
         </p14:section>
-        <p14:section name="Close" id="{420cc39a-d65c-6ddb-9ae5-bd3f7d019da7}">
+        <p14:section name="Close" id="{25679e94-5034-82e0-9422-9dc41fde539e}">
           <p14:sldIdLst>
             <p14:sldId id="268"/>
           </p14:sldIdLst>
         </p14:section>
-        <p14:section name="Answers" id="{54e72b70-8d05-7616-635f-b32c086b2f3c}">
+        <p14:section name="Answers" id="{3508a40d-fd53-2605-b18c-d4c5f9899992}">
           <p14:sldIdLst>
             <p14:sldId id="269"/>
             <p14:sldId id="270"/>
